--- a/08-capstone/buoi-08.pptx
+++ b/08-capstone/buoi-08.pptx
@@ -5,25 +5,25 @@
     <p:sldMasterId id="2147483648" r:id="rId1"/>
   </p:sldMasterIdLst>
   <p:sldIdLst>
-    <p:sldId id="256" r:id="rId7"/>
-    <p:sldId id="257" r:id="rId8"/>
-    <p:sldId id="258" r:id="rId9"/>
-    <p:sldId id="259" r:id="rId10"/>
-    <p:sldId id="260" r:id="rId11"/>
-    <p:sldId id="261" r:id="rId12"/>
-    <p:sldId id="262" r:id="rId13"/>
-    <p:sldId id="263" r:id="rId14"/>
-    <p:sldId id="264" r:id="rId15"/>
-    <p:sldId id="265" r:id="rId16"/>
-    <p:sldId id="266" r:id="rId17"/>
-    <p:sldId id="267" r:id="rId18"/>
-    <p:sldId id="268" r:id="rId19"/>
-    <p:sldId id="269" r:id="rId20"/>
-    <p:sldId id="270" r:id="rId21"/>
-    <p:sldId id="271" r:id="rId22"/>
-    <p:sldId id="272" r:id="rId23"/>
+    <p:sldId id="256" r:id="rId2"/>
+    <p:sldId id="257" r:id="rId3"/>
+    <p:sldId id="258" r:id="rId4"/>
+    <p:sldId id="259" r:id="rId5"/>
+    <p:sldId id="260" r:id="rId6"/>
+    <p:sldId id="261" r:id="rId7"/>
+    <p:sldId id="262" r:id="rId8"/>
+    <p:sldId id="263" r:id="rId9"/>
+    <p:sldId id="264" r:id="rId10"/>
+    <p:sldId id="265" r:id="rId11"/>
+    <p:sldId id="266" r:id="rId12"/>
+    <p:sldId id="267" r:id="rId13"/>
+    <p:sldId id="268" r:id="rId14"/>
+    <p:sldId id="269" r:id="rId15"/>
+    <p:sldId id="270" r:id="rId16"/>
+    <p:sldId id="271" r:id="rId17"/>
+    <p:sldId id="272" r:id="rId18"/>
   </p:sldIdLst>
-  <p:sldSz cx="18288000" cy="10287000" type="screen4x3"/>
+  <p:sldSz cx="18288000" cy="10287000"/>
   <p:notesSz cx="6858000" cy="9144000"/>
   <p:defaultTextStyle>
     <a:defPPr>
@@ -120,6 +120,22 @@
       </a:defRPr>
     </a:lvl9pPr>
   </p:defaultTextStyle>
+  <p:extLst>
+    <p:ext uri="{EFAFB233-063F-42B5-8137-9DF3F51BA10A}">
+      <p15:sldGuideLst xmlns:p15="http://schemas.microsoft.com/office/powerpoint/2012/main">
+        <p15:guide id="1" orient="horz" pos="2160">
+          <p15:clr>
+            <a:srgbClr val="A4A3A4"/>
+          </p15:clr>
+        </p15:guide>
+        <p15:guide id="2" pos="2880">
+          <p15:clr>
+            <a:srgbClr val="A4A3A4"/>
+          </p15:clr>
+        </p15:guide>
+      </p15:sldGuideLst>
+    </p:ext>
+  </p:extLst>
 </p:presentation>
 </file>
 
@@ -161,10 +177,9 @@
           <a:lstStyle/>
           <a:p>
             <a:r>
-              <a:rPr lang="en-US" smtClean="0"/>
+              <a:rPr lang="en-US"/>
               <a:t>Click to edit Master title style</a:t>
             </a:r>
-            <a:endParaRPr lang="en-US"/>
           </a:p>
         </p:txBody>
       </p:sp>
@@ -280,10 +295,9 @@
           </a:lstStyle>
           <a:p>
             <a:r>
-              <a:rPr lang="en-US" smtClean="0"/>
+              <a:rPr lang="en-US"/>
               <a:t>Click to edit Master subtitle style</a:t>
             </a:r>
-            <a:endParaRPr lang="en-US"/>
           </a:p>
         </p:txBody>
       </p:sp>
@@ -304,7 +318,7 @@
           <a:p>
             <a:fld id="{5BCAD085-E8A6-8845-BD4E-CB4CCA059FC4}" type="datetimeFigureOut">
               <a:rPr lang="en-US" smtClean="0"/>
-              <a:t>1/27/13</a:t>
+              <a:t>8/18/26</a:t>
             </a:fld>
             <a:endParaRPr lang="en-US"/>
           </a:p>
@@ -398,10 +412,9 @@
           <a:lstStyle/>
           <a:p>
             <a:r>
-              <a:rPr lang="en-US" smtClean="0"/>
+              <a:rPr lang="en-US"/>
               <a:t>Click to edit Master title style</a:t>
             </a:r>
-            <a:endParaRPr lang="en-US"/>
           </a:p>
         </p:txBody>
       </p:sp>
@@ -422,38 +435,37 @@
           <a:p>
             <a:pPr lvl="0"/>
             <a:r>
-              <a:rPr lang="en-US" smtClean="0"/>
+              <a:rPr lang="en-US"/>
               <a:t>Click to edit Master text styles</a:t>
             </a:r>
           </a:p>
           <a:p>
             <a:pPr lvl="1"/>
             <a:r>
-              <a:rPr lang="en-US" smtClean="0"/>
+              <a:rPr lang="en-US"/>
               <a:t>Second level</a:t>
             </a:r>
           </a:p>
           <a:p>
             <a:pPr lvl="2"/>
             <a:r>
-              <a:rPr lang="en-US" smtClean="0"/>
+              <a:rPr lang="en-US"/>
               <a:t>Third level</a:t>
             </a:r>
           </a:p>
           <a:p>
             <a:pPr lvl="3"/>
             <a:r>
-              <a:rPr lang="en-US" smtClean="0"/>
+              <a:rPr lang="en-US"/>
               <a:t>Fourth level</a:t>
             </a:r>
           </a:p>
           <a:p>
             <a:pPr lvl="4"/>
             <a:r>
-              <a:rPr lang="en-US" smtClean="0"/>
+              <a:rPr lang="en-US"/>
               <a:t>Fifth level</a:t>
             </a:r>
-            <a:endParaRPr lang="en-US"/>
           </a:p>
         </p:txBody>
       </p:sp>
@@ -474,7 +486,7 @@
           <a:p>
             <a:fld id="{5BCAD085-E8A6-8845-BD4E-CB4CCA059FC4}" type="datetimeFigureOut">
               <a:rPr lang="en-US" smtClean="0"/>
-              <a:t>1/27/13</a:t>
+              <a:t>8/18/26</a:t>
             </a:fld>
             <a:endParaRPr lang="en-US"/>
           </a:p>
@@ -573,10 +585,9 @@
           <a:lstStyle/>
           <a:p>
             <a:r>
-              <a:rPr lang="en-US" smtClean="0"/>
+              <a:rPr lang="en-US"/>
               <a:t>Click to edit Master title style</a:t>
             </a:r>
-            <a:endParaRPr lang="en-US"/>
           </a:p>
         </p:txBody>
       </p:sp>
@@ -602,38 +613,37 @@
           <a:p>
             <a:pPr lvl="0"/>
             <a:r>
-              <a:rPr lang="en-US" smtClean="0"/>
+              <a:rPr lang="en-US"/>
               <a:t>Click to edit Master text styles</a:t>
             </a:r>
           </a:p>
           <a:p>
             <a:pPr lvl="1"/>
             <a:r>
-              <a:rPr lang="en-US" smtClean="0"/>
+              <a:rPr lang="en-US"/>
               <a:t>Second level</a:t>
             </a:r>
           </a:p>
           <a:p>
             <a:pPr lvl="2"/>
             <a:r>
-              <a:rPr lang="en-US" smtClean="0"/>
+              <a:rPr lang="en-US"/>
               <a:t>Third level</a:t>
             </a:r>
           </a:p>
           <a:p>
             <a:pPr lvl="3"/>
             <a:r>
-              <a:rPr lang="en-US" smtClean="0"/>
+              <a:rPr lang="en-US"/>
               <a:t>Fourth level</a:t>
             </a:r>
           </a:p>
           <a:p>
             <a:pPr lvl="4"/>
             <a:r>
-              <a:rPr lang="en-US" smtClean="0"/>
+              <a:rPr lang="en-US"/>
               <a:t>Fifth level</a:t>
             </a:r>
-            <a:endParaRPr lang="en-US"/>
           </a:p>
         </p:txBody>
       </p:sp>
@@ -654,7 +664,7 @@
           <a:p>
             <a:fld id="{5BCAD085-E8A6-8845-BD4E-CB4CCA059FC4}" type="datetimeFigureOut">
               <a:rPr lang="en-US" smtClean="0"/>
-              <a:t>1/27/13</a:t>
+              <a:t>8/18/26</a:t>
             </a:fld>
             <a:endParaRPr lang="en-US"/>
           </a:p>
@@ -748,10 +758,9 @@
           <a:lstStyle/>
           <a:p>
             <a:r>
-              <a:rPr lang="en-US" smtClean="0"/>
+              <a:rPr lang="en-US"/>
               <a:t>Click to edit Master title style</a:t>
             </a:r>
-            <a:endParaRPr lang="en-US"/>
           </a:p>
         </p:txBody>
       </p:sp>
@@ -772,38 +781,37 @@
           <a:p>
             <a:pPr lvl="0"/>
             <a:r>
-              <a:rPr lang="en-US" smtClean="0"/>
+              <a:rPr lang="en-US"/>
               <a:t>Click to edit Master text styles</a:t>
             </a:r>
           </a:p>
           <a:p>
             <a:pPr lvl="1"/>
             <a:r>
-              <a:rPr lang="en-US" smtClean="0"/>
+              <a:rPr lang="en-US"/>
               <a:t>Second level</a:t>
             </a:r>
           </a:p>
           <a:p>
             <a:pPr lvl="2"/>
             <a:r>
-              <a:rPr lang="en-US" smtClean="0"/>
+              <a:rPr lang="en-US"/>
               <a:t>Third level</a:t>
             </a:r>
           </a:p>
           <a:p>
             <a:pPr lvl="3"/>
             <a:r>
-              <a:rPr lang="en-US" smtClean="0"/>
+              <a:rPr lang="en-US"/>
               <a:t>Fourth level</a:t>
             </a:r>
           </a:p>
           <a:p>
             <a:pPr lvl="4"/>
             <a:r>
-              <a:rPr lang="en-US" smtClean="0"/>
+              <a:rPr lang="en-US"/>
               <a:t>Fifth level</a:t>
             </a:r>
-            <a:endParaRPr lang="en-US"/>
           </a:p>
         </p:txBody>
       </p:sp>
@@ -824,7 +832,7 @@
           <a:p>
             <a:fld id="{5BCAD085-E8A6-8845-BD4E-CB4CCA059FC4}" type="datetimeFigureOut">
               <a:rPr lang="en-US" smtClean="0"/>
-              <a:t>1/27/13</a:t>
+              <a:t>8/18/26</a:t>
             </a:fld>
             <a:endParaRPr lang="en-US"/>
           </a:p>
@@ -927,10 +935,9 @@
           </a:lstStyle>
           <a:p>
             <a:r>
-              <a:rPr lang="en-US" smtClean="0"/>
+              <a:rPr lang="en-US"/>
               <a:t>Click to edit Master title style</a:t>
             </a:r>
-            <a:endParaRPr lang="en-US"/>
           </a:p>
         </p:txBody>
       </p:sp>
@@ -1047,7 +1054,7 @@
           <a:p>
             <a:pPr lvl="0"/>
             <a:r>
-              <a:rPr lang="en-US" smtClean="0"/>
+              <a:rPr lang="en-US"/>
               <a:t>Click to edit Master text styles</a:t>
             </a:r>
           </a:p>
@@ -1070,7 +1077,7 @@
           <a:p>
             <a:fld id="{5BCAD085-E8A6-8845-BD4E-CB4CCA059FC4}" type="datetimeFigureOut">
               <a:rPr lang="en-US" smtClean="0"/>
-              <a:t>1/27/13</a:t>
+              <a:t>8/18/26</a:t>
             </a:fld>
             <a:endParaRPr lang="en-US"/>
           </a:p>
@@ -1164,10 +1171,9 @@
           <a:lstStyle/>
           <a:p>
             <a:r>
-              <a:rPr lang="en-US" smtClean="0"/>
+              <a:rPr lang="en-US"/>
               <a:t>Click to edit Master title style</a:t>
             </a:r>
-            <a:endParaRPr lang="en-US"/>
           </a:p>
         </p:txBody>
       </p:sp>
@@ -1221,38 +1227,37 @@
           <a:p>
             <a:pPr lvl="0"/>
             <a:r>
-              <a:rPr lang="en-US" smtClean="0"/>
+              <a:rPr lang="en-US"/>
               <a:t>Click to edit Master text styles</a:t>
             </a:r>
           </a:p>
           <a:p>
             <a:pPr lvl="1"/>
             <a:r>
-              <a:rPr lang="en-US" smtClean="0"/>
+              <a:rPr lang="en-US"/>
               <a:t>Second level</a:t>
             </a:r>
           </a:p>
           <a:p>
             <a:pPr lvl="2"/>
             <a:r>
-              <a:rPr lang="en-US" smtClean="0"/>
+              <a:rPr lang="en-US"/>
               <a:t>Third level</a:t>
             </a:r>
           </a:p>
           <a:p>
             <a:pPr lvl="3"/>
             <a:r>
-              <a:rPr lang="en-US" smtClean="0"/>
+              <a:rPr lang="en-US"/>
               <a:t>Fourth level</a:t>
             </a:r>
           </a:p>
           <a:p>
             <a:pPr lvl="4"/>
             <a:r>
-              <a:rPr lang="en-US" smtClean="0"/>
+              <a:rPr lang="en-US"/>
               <a:t>Fifth level</a:t>
             </a:r>
-            <a:endParaRPr lang="en-US"/>
           </a:p>
         </p:txBody>
       </p:sp>
@@ -1306,38 +1311,37 @@
           <a:p>
             <a:pPr lvl="0"/>
             <a:r>
-              <a:rPr lang="en-US" smtClean="0"/>
+              <a:rPr lang="en-US"/>
               <a:t>Click to edit Master text styles</a:t>
             </a:r>
           </a:p>
           <a:p>
             <a:pPr lvl="1"/>
             <a:r>
-              <a:rPr lang="en-US" smtClean="0"/>
+              <a:rPr lang="en-US"/>
               <a:t>Second level</a:t>
             </a:r>
           </a:p>
           <a:p>
             <a:pPr lvl="2"/>
             <a:r>
-              <a:rPr lang="en-US" smtClean="0"/>
+              <a:rPr lang="en-US"/>
               <a:t>Third level</a:t>
             </a:r>
           </a:p>
           <a:p>
             <a:pPr lvl="3"/>
             <a:r>
-              <a:rPr lang="en-US" smtClean="0"/>
+              <a:rPr lang="en-US"/>
               <a:t>Fourth level</a:t>
             </a:r>
           </a:p>
           <a:p>
             <a:pPr lvl="4"/>
             <a:r>
-              <a:rPr lang="en-US" smtClean="0"/>
+              <a:rPr lang="en-US"/>
               <a:t>Fifth level</a:t>
             </a:r>
-            <a:endParaRPr lang="en-US"/>
           </a:p>
         </p:txBody>
       </p:sp>
@@ -1358,7 +1362,7 @@
           <a:p>
             <a:fld id="{5BCAD085-E8A6-8845-BD4E-CB4CCA059FC4}" type="datetimeFigureOut">
               <a:rPr lang="en-US" smtClean="0"/>
-              <a:t>1/27/13</a:t>
+              <a:t>8/18/26</a:t>
             </a:fld>
             <a:endParaRPr lang="en-US"/>
           </a:p>
@@ -1456,10 +1460,9 @@
           </a:lstStyle>
           <a:p>
             <a:r>
-              <a:rPr lang="en-US" smtClean="0"/>
+              <a:rPr lang="en-US"/>
               <a:t>Click to edit Master title style</a:t>
             </a:r>
-            <a:endParaRPr lang="en-US"/>
           </a:p>
         </p:txBody>
       </p:sp>
@@ -1522,7 +1525,7 @@
           <a:p>
             <a:pPr lvl="0"/>
             <a:r>
-              <a:rPr lang="en-US" smtClean="0"/>
+              <a:rPr lang="en-US"/>
               <a:t>Click to edit Master text styles</a:t>
             </a:r>
           </a:p>
@@ -1578,38 +1581,37 @@
           <a:p>
             <a:pPr lvl="0"/>
             <a:r>
-              <a:rPr lang="en-US" smtClean="0"/>
+              <a:rPr lang="en-US"/>
               <a:t>Click to edit Master text styles</a:t>
             </a:r>
           </a:p>
           <a:p>
             <a:pPr lvl="1"/>
             <a:r>
-              <a:rPr lang="en-US" smtClean="0"/>
+              <a:rPr lang="en-US"/>
               <a:t>Second level</a:t>
             </a:r>
           </a:p>
           <a:p>
             <a:pPr lvl="2"/>
             <a:r>
-              <a:rPr lang="en-US" smtClean="0"/>
+              <a:rPr lang="en-US"/>
               <a:t>Third level</a:t>
             </a:r>
           </a:p>
           <a:p>
             <a:pPr lvl="3"/>
             <a:r>
-              <a:rPr lang="en-US" smtClean="0"/>
+              <a:rPr lang="en-US"/>
               <a:t>Fourth level</a:t>
             </a:r>
           </a:p>
           <a:p>
             <a:pPr lvl="4"/>
             <a:r>
-              <a:rPr lang="en-US" smtClean="0"/>
+              <a:rPr lang="en-US"/>
               <a:t>Fifth level</a:t>
             </a:r>
-            <a:endParaRPr lang="en-US"/>
           </a:p>
         </p:txBody>
       </p:sp>
@@ -1672,7 +1674,7 @@
           <a:p>
             <a:pPr lvl="0"/>
             <a:r>
-              <a:rPr lang="en-US" smtClean="0"/>
+              <a:rPr lang="en-US"/>
               <a:t>Click to edit Master text styles</a:t>
             </a:r>
           </a:p>
@@ -1728,38 +1730,37 @@
           <a:p>
             <a:pPr lvl="0"/>
             <a:r>
-              <a:rPr lang="en-US" smtClean="0"/>
+              <a:rPr lang="en-US"/>
               <a:t>Click to edit Master text styles</a:t>
             </a:r>
           </a:p>
           <a:p>
             <a:pPr lvl="1"/>
             <a:r>
-              <a:rPr lang="en-US" smtClean="0"/>
+              <a:rPr lang="en-US"/>
               <a:t>Second level</a:t>
             </a:r>
           </a:p>
           <a:p>
             <a:pPr lvl="2"/>
             <a:r>
-              <a:rPr lang="en-US" smtClean="0"/>
+              <a:rPr lang="en-US"/>
               <a:t>Third level</a:t>
             </a:r>
           </a:p>
           <a:p>
             <a:pPr lvl="3"/>
             <a:r>
-              <a:rPr lang="en-US" smtClean="0"/>
+              <a:rPr lang="en-US"/>
               <a:t>Fourth level</a:t>
             </a:r>
           </a:p>
           <a:p>
             <a:pPr lvl="4"/>
             <a:r>
-              <a:rPr lang="en-US" smtClean="0"/>
+              <a:rPr lang="en-US"/>
               <a:t>Fifth level</a:t>
             </a:r>
-            <a:endParaRPr lang="en-US"/>
           </a:p>
         </p:txBody>
       </p:sp>
@@ -1780,7 +1781,7 @@
           <a:p>
             <a:fld id="{5BCAD085-E8A6-8845-BD4E-CB4CCA059FC4}" type="datetimeFigureOut">
               <a:rPr lang="en-US" smtClean="0"/>
-              <a:t>1/27/13</a:t>
+              <a:t>8/18/26</a:t>
             </a:fld>
             <a:endParaRPr lang="en-US"/>
           </a:p>
@@ -1874,10 +1875,9 @@
           <a:lstStyle/>
           <a:p>
             <a:r>
-              <a:rPr lang="en-US" smtClean="0"/>
+              <a:rPr lang="en-US"/>
               <a:t>Click to edit Master title style</a:t>
             </a:r>
-            <a:endParaRPr lang="en-US"/>
           </a:p>
         </p:txBody>
       </p:sp>
@@ -1898,7 +1898,7 @@
           <a:p>
             <a:fld id="{5BCAD085-E8A6-8845-BD4E-CB4CCA059FC4}" type="datetimeFigureOut">
               <a:rPr lang="en-US" smtClean="0"/>
-              <a:t>1/27/13</a:t>
+              <a:t>8/18/26</a:t>
             </a:fld>
             <a:endParaRPr lang="en-US"/>
           </a:p>
@@ -1993,7 +1993,7 @@
           <a:p>
             <a:fld id="{5BCAD085-E8A6-8845-BD4E-CB4CCA059FC4}" type="datetimeFigureOut">
               <a:rPr lang="en-US" smtClean="0"/>
-              <a:t>1/27/13</a:t>
+              <a:t>8/18/26</a:t>
             </a:fld>
             <a:endParaRPr lang="en-US"/>
           </a:p>
@@ -2096,10 +2096,9 @@
           </a:lstStyle>
           <a:p>
             <a:r>
-              <a:rPr lang="en-US" smtClean="0"/>
+              <a:rPr lang="en-US"/>
               <a:t>Click to edit Master title style</a:t>
             </a:r>
-            <a:endParaRPr lang="en-US"/>
           </a:p>
         </p:txBody>
       </p:sp>
@@ -2153,38 +2152,37 @@
           <a:p>
             <a:pPr lvl="0"/>
             <a:r>
-              <a:rPr lang="en-US" smtClean="0"/>
+              <a:rPr lang="en-US"/>
               <a:t>Click to edit Master text styles</a:t>
             </a:r>
           </a:p>
           <a:p>
             <a:pPr lvl="1"/>
             <a:r>
-              <a:rPr lang="en-US" smtClean="0"/>
+              <a:rPr lang="en-US"/>
               <a:t>Second level</a:t>
             </a:r>
           </a:p>
           <a:p>
             <a:pPr lvl="2"/>
             <a:r>
-              <a:rPr lang="en-US" smtClean="0"/>
+              <a:rPr lang="en-US"/>
               <a:t>Third level</a:t>
             </a:r>
           </a:p>
           <a:p>
             <a:pPr lvl="3"/>
             <a:r>
-              <a:rPr lang="en-US" smtClean="0"/>
+              <a:rPr lang="en-US"/>
               <a:t>Fourth level</a:t>
             </a:r>
           </a:p>
           <a:p>
             <a:pPr lvl="4"/>
             <a:r>
-              <a:rPr lang="en-US" smtClean="0"/>
+              <a:rPr lang="en-US"/>
               <a:t>Fifth level</a:t>
             </a:r>
-            <a:endParaRPr lang="en-US"/>
           </a:p>
         </p:txBody>
       </p:sp>
@@ -2247,7 +2245,7 @@
           <a:p>
             <a:pPr lvl="0"/>
             <a:r>
-              <a:rPr lang="en-US" smtClean="0"/>
+              <a:rPr lang="en-US"/>
               <a:t>Click to edit Master text styles</a:t>
             </a:r>
           </a:p>
@@ -2270,7 +2268,7 @@
           <a:p>
             <a:fld id="{5BCAD085-E8A6-8845-BD4E-CB4CCA059FC4}" type="datetimeFigureOut">
               <a:rPr lang="en-US" smtClean="0"/>
-              <a:t>1/27/13</a:t>
+              <a:t>8/18/26</a:t>
             </a:fld>
             <a:endParaRPr lang="en-US"/>
           </a:p>
@@ -2373,10 +2371,9 @@
           </a:lstStyle>
           <a:p>
             <a:r>
-              <a:rPr lang="en-US" smtClean="0"/>
+              <a:rPr lang="en-US"/>
               <a:t>Click to edit Master title style</a:t>
             </a:r>
-            <a:endParaRPr lang="en-US"/>
           </a:p>
         </p:txBody>
       </p:sp>
@@ -2500,7 +2497,7 @@
           <a:p>
             <a:pPr lvl="0"/>
             <a:r>
-              <a:rPr lang="en-US" smtClean="0"/>
+              <a:rPr lang="en-US"/>
               <a:t>Click to edit Master text styles</a:t>
             </a:r>
           </a:p>
@@ -2523,7 +2520,7 @@
           <a:p>
             <a:fld id="{5BCAD085-E8A6-8845-BD4E-CB4CCA059FC4}" type="datetimeFigureOut">
               <a:rPr lang="en-US" smtClean="0"/>
-              <a:t>1/27/13</a:t>
+              <a:t>8/18/26</a:t>
             </a:fld>
             <a:endParaRPr lang="en-US"/>
           </a:p>
@@ -2632,10 +2629,9 @@
           <a:lstStyle/>
           <a:p>
             <a:r>
-              <a:rPr lang="en-US" smtClean="0"/>
+              <a:rPr lang="en-US"/>
               <a:t>Click to edit Master title style</a:t>
             </a:r>
-            <a:endParaRPr lang="en-US"/>
           </a:p>
         </p:txBody>
       </p:sp>
@@ -2666,38 +2662,37 @@
           <a:p>
             <a:pPr lvl="0"/>
             <a:r>
-              <a:rPr lang="en-US" smtClean="0"/>
+              <a:rPr lang="en-US"/>
               <a:t>Click to edit Master text styles</a:t>
             </a:r>
           </a:p>
           <a:p>
             <a:pPr lvl="1"/>
             <a:r>
-              <a:rPr lang="en-US" smtClean="0"/>
+              <a:rPr lang="en-US"/>
               <a:t>Second level</a:t>
             </a:r>
           </a:p>
           <a:p>
             <a:pPr lvl="2"/>
             <a:r>
-              <a:rPr lang="en-US" smtClean="0"/>
+              <a:rPr lang="en-US"/>
               <a:t>Third level</a:t>
             </a:r>
           </a:p>
           <a:p>
             <a:pPr lvl="3"/>
             <a:r>
-              <a:rPr lang="en-US" smtClean="0"/>
+              <a:rPr lang="en-US"/>
               <a:t>Fourth level</a:t>
             </a:r>
           </a:p>
           <a:p>
             <a:pPr lvl="4"/>
             <a:r>
-              <a:rPr lang="en-US" smtClean="0"/>
+              <a:rPr lang="en-US"/>
               <a:t>Fifth level</a:t>
             </a:r>
-            <a:endParaRPr lang="en-US"/>
           </a:p>
         </p:txBody>
       </p:sp>
@@ -2736,7 +2731,7 @@
           <a:p>
             <a:fld id="{5BCAD085-E8A6-8845-BD4E-CB4CCA059FC4}" type="datetimeFigureOut">
               <a:rPr lang="en-US" smtClean="0"/>
-              <a:t>1/27/13</a:t>
+              <a:t>8/18/26</a:t>
             </a:fld>
             <a:endParaRPr lang="en-US"/>
           </a:p>
@@ -3095,7 +3090,7 @@
 </file>
 
 <file path=ppt/slides/slide1.xml><?xml version="1.0" encoding="utf-8"?>
-<p:sld xmlns:a="http://schemas.openxmlformats.org/drawingml/2006/main" xmlns:p="http://schemas.openxmlformats.org/presentationml/2006/main" xmlns:r="http://schemas.openxmlformats.org/officeDocument/2006/relationships">
+<p:sld xmlns:a="http://schemas.openxmlformats.org/drawingml/2006/main" xmlns:r="http://schemas.openxmlformats.org/officeDocument/2006/relationships" xmlns:p="http://schemas.openxmlformats.org/presentationml/2006/main">
   <p:cSld>
     <p:spTree>
       <p:nvGrpSpPr>
@@ -3103,7 +3098,14 @@
         <p:cNvGrpSpPr/>
         <p:nvPr/>
       </p:nvGrpSpPr>
-      <p:grpSpPr/>
+      <p:grpSpPr>
+        <a:xfrm>
+          <a:off x="0" y="0"/>
+          <a:ext cx="0" cy="0"/>
+          <a:chOff x="0" y="0"/>
+          <a:chExt cx="0" cy="0"/>
+        </a:xfrm>
+      </p:grpSpPr>
       <p:pic>
         <p:nvPicPr>
           <p:cNvPr id="2" name="Picture 1" descr="cover_bg.jpeg"/>
@@ -3137,28 +3139,46 @@
         <p:spPr>
           <a:xfrm>
             <a:off x="540000" y="720000"/>
-            <a:ext cx="16560000" cy="1980000"/>
-          </a:xfrm>
-          <a:prstGeom prst="rect">
-            <a:avLst/>
-          </a:prstGeom>
-          <a:noFill/>
-        </p:spPr>
-        <p:txBody>
-          <a:bodyPr wrap="square">
-            <a:spAutoFit/>
-          </a:bodyPr>
-          <a:lstStyle/>
-          <a:p>
-            <a:pPr algn="l"/>
-            <a:r>
-              <a:rPr sz="7200" b="1">
+            <a:ext cx="16560000" cy="2308324"/>
+          </a:xfrm>
+          <a:prstGeom prst="rect">
+            <a:avLst/>
+          </a:prstGeom>
+          <a:noFill/>
+        </p:spPr>
+        <p:txBody>
+          <a:bodyPr wrap="square">
+            <a:spAutoFit/>
+          </a:bodyPr>
+          <a:lstStyle/>
+          <a:p>
+            <a:pPr algn="l"/>
+            <a:r>
+              <a:rPr sz="7200" b="1" dirty="0">
                 <a:solidFill>
                   <a:srgbClr val="FFFFFF"/>
                 </a:solidFill>
                 <a:latin typeface="Calibri"/>
               </a:rPr>
-              <a:t>NỀN TẢNG CHO AI AUTOMATION VÀ VIBE CODER K1</a:t>
+              <a:t>NỀN TẢNG CHO AI AUTOMATION </a:t>
+            </a:r>
+            <a:endParaRPr lang="en-US" sz="7200" b="1" dirty="0">
+              <a:solidFill>
+                <a:srgbClr val="FFFFFF"/>
+              </a:solidFill>
+              <a:latin typeface="Calibri"/>
+            </a:endParaRPr>
+          </a:p>
+          <a:p>
+            <a:pPr algn="l"/>
+            <a:r>
+              <a:rPr sz="7200" b="1" dirty="0">
+                <a:solidFill>
+                  <a:srgbClr val="FFFFFF"/>
+                </a:solidFill>
+                <a:latin typeface="Calibri"/>
+              </a:rPr>
+              <a:t>VÀ VIBE CODER K1</a:t>
             </a:r>
           </a:p>
         </p:txBody>
@@ -3207,29 +3227,53 @@
         <p:spPr>
           <a:xfrm>
             <a:off x="540000" y="4860000"/>
-            <a:ext cx="14400000" cy="900000"/>
-          </a:xfrm>
-          <a:prstGeom prst="rect">
-            <a:avLst/>
-          </a:prstGeom>
-          <a:noFill/>
-        </p:spPr>
-        <p:txBody>
-          <a:bodyPr wrap="square">
-            <a:spAutoFit/>
-          </a:bodyPr>
-          <a:lstStyle/>
-          <a:p>
-            <a:pPr algn="l"/>
-            <a:r>
-              <a:rPr sz="2600" b="0">
+            <a:ext cx="14400000" cy="492443"/>
+          </a:xfrm>
+          <a:prstGeom prst="rect">
+            <a:avLst/>
+          </a:prstGeom>
+          <a:noFill/>
+        </p:spPr>
+        <p:txBody>
+          <a:bodyPr wrap="square">
+            <a:spAutoFit/>
+          </a:bodyPr>
+          <a:lstStyle/>
+          <a:p>
+            <a:pPr algn="l"/>
+            <a:r>
+              <a:rPr sz="2600" b="0" dirty="0" err="1">
                 <a:solidFill>
                   <a:srgbClr val="DDE8F0"/>
                 </a:solidFill>
                 <a:latin typeface="Calibri"/>
               </a:rPr>
-              <a:t>Thứ 3, 18/08/2026  |  19:30–21:30  |  Offline</a:t>
-            </a:r>
+              <a:t>Thứ</a:t>
+            </a:r>
+            <a:r>
+              <a:rPr sz="2600" b="0" dirty="0">
+                <a:solidFill>
+                  <a:srgbClr val="DDE8F0"/>
+                </a:solidFill>
+                <a:latin typeface="Calibri"/>
+              </a:rPr>
+              <a:t> 3, 18/08/2026  |  19:30–21:30  |  </a:t>
+            </a:r>
+            <a:r>
+              <a:rPr lang="en-US" sz="2600" b="0" dirty="0">
+                <a:solidFill>
+                  <a:srgbClr val="DDE8F0"/>
+                </a:solidFill>
+                <a:latin typeface="Calibri"/>
+              </a:rPr>
+              <a:t>Online</a:t>
+            </a:r>
+            <a:endParaRPr sz="2600" b="0" dirty="0">
+              <a:solidFill>
+                <a:srgbClr val="DDE8F0"/>
+              </a:solidFill>
+              <a:latin typeface="Calibri"/>
+            </a:endParaRPr>
           </a:p>
         </p:txBody>
       </p:sp>
@@ -3242,7 +3286,7 @@
 </file>
 
 <file path=ppt/slides/slide10.xml><?xml version="1.0" encoding="utf-8"?>
-<p:sld xmlns:a="http://schemas.openxmlformats.org/drawingml/2006/main" xmlns:p="http://schemas.openxmlformats.org/presentationml/2006/main" xmlns:r="http://schemas.openxmlformats.org/officeDocument/2006/relationships">
+<p:sld xmlns:a="http://schemas.openxmlformats.org/drawingml/2006/main" xmlns:r="http://schemas.openxmlformats.org/officeDocument/2006/relationships" xmlns:p="http://schemas.openxmlformats.org/presentationml/2006/main">
   <p:cSld>
     <p:spTree>
       <p:nvGrpSpPr>
@@ -3250,7 +3294,14 @@
         <p:cNvGrpSpPr/>
         <p:nvPr/>
       </p:nvGrpSpPr>
-      <p:grpSpPr/>
+      <p:grpSpPr>
+        <a:xfrm>
+          <a:off x="0" y="0"/>
+          <a:ext cx="0" cy="0"/>
+          <a:chOff x="0" y="0"/>
+          <a:chExt cx="0" cy="0"/>
+        </a:xfrm>
+      </p:grpSpPr>
       <p:sp>
         <p:nvSpPr>
           <p:cNvPr id="2" name="Rectangle 1"/>
@@ -3291,6 +3342,7 @@
           <a:lstStyle/>
           <a:p>
             <a:pPr algn="ctr"/>
+            <a:endParaRPr/>
           </a:p>
         </p:txBody>
       </p:sp>
@@ -3369,6 +3421,7 @@
           <a:lstStyle/>
           <a:p>
             <a:pPr algn="ctr"/>
+            <a:endParaRPr/>
           </a:p>
         </p:txBody>
       </p:sp>
@@ -3626,7 +3679,7 @@
 </file>
 
 <file path=ppt/slides/slide11.xml><?xml version="1.0" encoding="utf-8"?>
-<p:sld xmlns:a="http://schemas.openxmlformats.org/drawingml/2006/main" xmlns:p="http://schemas.openxmlformats.org/presentationml/2006/main" xmlns:r="http://schemas.openxmlformats.org/officeDocument/2006/relationships">
+<p:sld xmlns:a="http://schemas.openxmlformats.org/drawingml/2006/main" xmlns:r="http://schemas.openxmlformats.org/officeDocument/2006/relationships" xmlns:p="http://schemas.openxmlformats.org/presentationml/2006/main">
   <p:cSld>
     <p:spTree>
       <p:nvGrpSpPr>
@@ -3634,7 +3687,14 @@
         <p:cNvGrpSpPr/>
         <p:nvPr/>
       </p:nvGrpSpPr>
-      <p:grpSpPr/>
+      <p:grpSpPr>
+        <a:xfrm>
+          <a:off x="0" y="0"/>
+          <a:ext cx="0" cy="0"/>
+          <a:chOff x="0" y="0"/>
+          <a:chExt cx="0" cy="0"/>
+        </a:xfrm>
+      </p:grpSpPr>
       <p:sp>
         <p:nvSpPr>
           <p:cNvPr id="2" name="Rectangle 1"/>
@@ -3675,6 +3735,7 @@
           <a:lstStyle/>
           <a:p>
             <a:pPr algn="ctr"/>
+            <a:endParaRPr/>
           </a:p>
         </p:txBody>
       </p:sp>
@@ -3753,6 +3814,7 @@
           <a:lstStyle/>
           <a:p>
             <a:pPr algn="ctr"/>
+            <a:endParaRPr/>
           </a:p>
         </p:txBody>
       </p:sp>
@@ -4006,6 +4068,7 @@
           <a:lstStyle/>
           <a:p>
             <a:pPr algn="ctr"/>
+            <a:endParaRPr/>
           </a:p>
         </p:txBody>
       </p:sp>
@@ -4084,6 +4147,7 @@
           <a:lstStyle/>
           <a:p>
             <a:pPr algn="ctr"/>
+            <a:endParaRPr/>
           </a:p>
         </p:txBody>
       </p:sp>
@@ -4131,7 +4195,7 @@
 </file>
 
 <file path=ppt/slides/slide12.xml><?xml version="1.0" encoding="utf-8"?>
-<p:sld xmlns:a="http://schemas.openxmlformats.org/drawingml/2006/main" xmlns:p="http://schemas.openxmlformats.org/presentationml/2006/main" xmlns:r="http://schemas.openxmlformats.org/officeDocument/2006/relationships">
+<p:sld xmlns:a="http://schemas.openxmlformats.org/drawingml/2006/main" xmlns:r="http://schemas.openxmlformats.org/officeDocument/2006/relationships" xmlns:p="http://schemas.openxmlformats.org/presentationml/2006/main">
   <p:cSld>
     <p:spTree>
       <p:nvGrpSpPr>
@@ -4139,7 +4203,14 @@
         <p:cNvGrpSpPr/>
         <p:nvPr/>
       </p:nvGrpSpPr>
-      <p:grpSpPr/>
+      <p:grpSpPr>
+        <a:xfrm>
+          <a:off x="0" y="0"/>
+          <a:ext cx="0" cy="0"/>
+          <a:chOff x="0" y="0"/>
+          <a:chExt cx="0" cy="0"/>
+        </a:xfrm>
+      </p:grpSpPr>
       <p:sp>
         <p:nvSpPr>
           <p:cNvPr id="2" name="Rectangle 1"/>
@@ -4180,6 +4251,7 @@
           <a:lstStyle/>
           <a:p>
             <a:pPr algn="ctr"/>
+            <a:endParaRPr/>
           </a:p>
         </p:txBody>
       </p:sp>
@@ -4258,6 +4330,7 @@
           <a:lstStyle/>
           <a:p>
             <a:pPr algn="ctr"/>
+            <a:endParaRPr/>
           </a:p>
         </p:txBody>
       </p:sp>
@@ -4441,6 +4514,7 @@
           <a:lstStyle/>
           <a:p>
             <a:pPr algn="ctr"/>
+            <a:endParaRPr/>
           </a:p>
         </p:txBody>
       </p:sp>
@@ -4519,6 +4593,7 @@
           <a:lstStyle/>
           <a:p>
             <a:pPr algn="ctr"/>
+            <a:endParaRPr/>
           </a:p>
         </p:txBody>
       </p:sp>
@@ -4566,7 +4641,7 @@
 </file>
 
 <file path=ppt/slides/slide13.xml><?xml version="1.0" encoding="utf-8"?>
-<p:sld xmlns:a="http://schemas.openxmlformats.org/drawingml/2006/main" xmlns:p="http://schemas.openxmlformats.org/presentationml/2006/main" xmlns:r="http://schemas.openxmlformats.org/officeDocument/2006/relationships">
+<p:sld xmlns:a="http://schemas.openxmlformats.org/drawingml/2006/main" xmlns:r="http://schemas.openxmlformats.org/officeDocument/2006/relationships" xmlns:p="http://schemas.openxmlformats.org/presentationml/2006/main">
   <p:cSld>
     <p:spTree>
       <p:nvGrpSpPr>
@@ -4574,7 +4649,14 @@
         <p:cNvGrpSpPr/>
         <p:nvPr/>
       </p:nvGrpSpPr>
-      <p:grpSpPr/>
+      <p:grpSpPr>
+        <a:xfrm>
+          <a:off x="0" y="0"/>
+          <a:ext cx="0" cy="0"/>
+          <a:chOff x="0" y="0"/>
+          <a:chExt cx="0" cy="0"/>
+        </a:xfrm>
+      </p:grpSpPr>
       <p:sp>
         <p:nvSpPr>
           <p:cNvPr id="2" name="Rectangle 1"/>
@@ -4615,6 +4697,7 @@
           <a:lstStyle/>
           <a:p>
             <a:pPr algn="ctr"/>
+            <a:endParaRPr/>
           </a:p>
         </p:txBody>
       </p:sp>
@@ -4693,6 +4776,7 @@
           <a:lstStyle/>
           <a:p>
             <a:pPr algn="ctr"/>
+            <a:endParaRPr/>
           </a:p>
         </p:txBody>
       </p:sp>
@@ -4946,6 +5030,7 @@
           <a:lstStyle/>
           <a:p>
             <a:pPr algn="ctr"/>
+            <a:endParaRPr/>
           </a:p>
         </p:txBody>
       </p:sp>
@@ -5024,6 +5109,7 @@
           <a:lstStyle/>
           <a:p>
             <a:pPr algn="ctr"/>
+            <a:endParaRPr/>
           </a:p>
         </p:txBody>
       </p:sp>
@@ -5071,7 +5157,7 @@
 </file>
 
 <file path=ppt/slides/slide14.xml><?xml version="1.0" encoding="utf-8"?>
-<p:sld xmlns:a="http://schemas.openxmlformats.org/drawingml/2006/main" xmlns:p="http://schemas.openxmlformats.org/presentationml/2006/main" xmlns:r="http://schemas.openxmlformats.org/officeDocument/2006/relationships">
+<p:sld xmlns:a="http://schemas.openxmlformats.org/drawingml/2006/main" xmlns:r="http://schemas.openxmlformats.org/officeDocument/2006/relationships" xmlns:p="http://schemas.openxmlformats.org/presentationml/2006/main">
   <p:cSld>
     <p:spTree>
       <p:nvGrpSpPr>
@@ -5079,7 +5165,14 @@
         <p:cNvGrpSpPr/>
         <p:nvPr/>
       </p:nvGrpSpPr>
-      <p:grpSpPr/>
+      <p:grpSpPr>
+        <a:xfrm>
+          <a:off x="0" y="0"/>
+          <a:ext cx="0" cy="0"/>
+          <a:chOff x="0" y="0"/>
+          <a:chExt cx="0" cy="0"/>
+        </a:xfrm>
+      </p:grpSpPr>
       <p:sp>
         <p:nvSpPr>
           <p:cNvPr id="2" name="Rectangle 1"/>
@@ -5120,6 +5213,7 @@
           <a:lstStyle/>
           <a:p>
             <a:pPr algn="ctr"/>
+            <a:endParaRPr/>
           </a:p>
         </p:txBody>
       </p:sp>
@@ -5198,6 +5292,7 @@
           <a:lstStyle/>
           <a:p>
             <a:pPr algn="ctr"/>
+            <a:endParaRPr/>
           </a:p>
         </p:txBody>
       </p:sp>
@@ -5490,7 +5585,7 @@
 </file>
 
 <file path=ppt/slides/slide15.xml><?xml version="1.0" encoding="utf-8"?>
-<p:sld xmlns:a="http://schemas.openxmlformats.org/drawingml/2006/main" xmlns:p="http://schemas.openxmlformats.org/presentationml/2006/main" xmlns:r="http://schemas.openxmlformats.org/officeDocument/2006/relationships">
+<p:sld xmlns:a="http://schemas.openxmlformats.org/drawingml/2006/main" xmlns:r="http://schemas.openxmlformats.org/officeDocument/2006/relationships" xmlns:p="http://schemas.openxmlformats.org/presentationml/2006/main">
   <p:cSld>
     <p:spTree>
       <p:nvGrpSpPr>
@@ -5498,7 +5593,14 @@
         <p:cNvGrpSpPr/>
         <p:nvPr/>
       </p:nvGrpSpPr>
-      <p:grpSpPr/>
+      <p:grpSpPr>
+        <a:xfrm>
+          <a:off x="0" y="0"/>
+          <a:ext cx="0" cy="0"/>
+          <a:chOff x="0" y="0"/>
+          <a:chExt cx="0" cy="0"/>
+        </a:xfrm>
+      </p:grpSpPr>
       <p:sp>
         <p:nvSpPr>
           <p:cNvPr id="2" name="Rectangle 1"/>
@@ -5539,6 +5641,7 @@
           <a:lstStyle/>
           <a:p>
             <a:pPr algn="ctr"/>
+            <a:endParaRPr/>
           </a:p>
         </p:txBody>
       </p:sp>
@@ -5617,6 +5720,7 @@
           <a:lstStyle/>
           <a:p>
             <a:pPr algn="ctr"/>
+            <a:endParaRPr/>
           </a:p>
         </p:txBody>
       </p:sp>
@@ -5660,6 +5764,7 @@
           <a:lstStyle/>
           <a:p>
             <a:pPr algn="ctr"/>
+            <a:endParaRPr/>
           </a:p>
         </p:txBody>
       </p:sp>
@@ -5808,6 +5913,7 @@
           <a:lstStyle/>
           <a:p>
             <a:pPr algn="ctr"/>
+            <a:endParaRPr/>
           </a:p>
         </p:txBody>
       </p:sp>
@@ -5956,6 +6062,7 @@
           <a:lstStyle/>
           <a:p>
             <a:pPr algn="ctr"/>
+            <a:endParaRPr/>
           </a:p>
         </p:txBody>
       </p:sp>
@@ -6104,6 +6211,7 @@
           <a:lstStyle/>
           <a:p>
             <a:pPr algn="ctr"/>
+            <a:endParaRPr/>
           </a:p>
         </p:txBody>
       </p:sp>
@@ -6252,6 +6360,7 @@
           <a:lstStyle/>
           <a:p>
             <a:pPr algn="ctr"/>
+            <a:endParaRPr/>
           </a:p>
         </p:txBody>
       </p:sp>
@@ -6400,6 +6509,7 @@
           <a:lstStyle/>
           <a:p>
             <a:pPr algn="ctr"/>
+            <a:endParaRPr/>
           </a:p>
         </p:txBody>
       </p:sp>
@@ -6517,7 +6627,7 @@
 </file>
 
 <file path=ppt/slides/slide16.xml><?xml version="1.0" encoding="utf-8"?>
-<p:sld xmlns:a="http://schemas.openxmlformats.org/drawingml/2006/main" xmlns:p="http://schemas.openxmlformats.org/presentationml/2006/main" xmlns:r="http://schemas.openxmlformats.org/officeDocument/2006/relationships">
+<p:sld xmlns:a="http://schemas.openxmlformats.org/drawingml/2006/main" xmlns:r="http://schemas.openxmlformats.org/officeDocument/2006/relationships" xmlns:p="http://schemas.openxmlformats.org/presentationml/2006/main">
   <p:cSld>
     <p:spTree>
       <p:nvGrpSpPr>
@@ -6525,7 +6635,14 @@
         <p:cNvGrpSpPr/>
         <p:nvPr/>
       </p:nvGrpSpPr>
-      <p:grpSpPr/>
+      <p:grpSpPr>
+        <a:xfrm>
+          <a:off x="0" y="0"/>
+          <a:ext cx="0" cy="0"/>
+          <a:chOff x="0" y="0"/>
+          <a:chExt cx="0" cy="0"/>
+        </a:xfrm>
+      </p:grpSpPr>
       <p:sp>
         <p:nvSpPr>
           <p:cNvPr id="2" name="Rectangle 1"/>
@@ -6566,6 +6683,7 @@
           <a:lstStyle/>
           <a:p>
             <a:pPr algn="ctr"/>
+            <a:endParaRPr/>
           </a:p>
         </p:txBody>
       </p:sp>
@@ -6644,6 +6762,7 @@
           <a:lstStyle/>
           <a:p>
             <a:pPr algn="ctr"/>
+            <a:endParaRPr/>
           </a:p>
         </p:txBody>
       </p:sp>
@@ -6866,7 +6985,7 @@
 </file>
 
 <file path=ppt/slides/slide17.xml><?xml version="1.0" encoding="utf-8"?>
-<p:sld xmlns:a="http://schemas.openxmlformats.org/drawingml/2006/main" xmlns:p="http://schemas.openxmlformats.org/presentationml/2006/main" xmlns:r="http://schemas.openxmlformats.org/officeDocument/2006/relationships">
+<p:sld xmlns:a="http://schemas.openxmlformats.org/drawingml/2006/main" xmlns:r="http://schemas.openxmlformats.org/officeDocument/2006/relationships" xmlns:p="http://schemas.openxmlformats.org/presentationml/2006/main">
   <p:cSld>
     <p:spTree>
       <p:nvGrpSpPr>
@@ -6874,7 +6993,14 @@
         <p:cNvGrpSpPr/>
         <p:nvPr/>
       </p:nvGrpSpPr>
-      <p:grpSpPr/>
+      <p:grpSpPr>
+        <a:xfrm>
+          <a:off x="0" y="0"/>
+          <a:ext cx="0" cy="0"/>
+          <a:chOff x="0" y="0"/>
+          <a:chExt cx="0" cy="0"/>
+        </a:xfrm>
+      </p:grpSpPr>
       <p:sp>
         <p:nvSpPr>
           <p:cNvPr id="2" name="Rectangle 1"/>
@@ -6915,6 +7041,7 @@
           <a:lstStyle/>
           <a:p>
             <a:pPr algn="ctr"/>
+            <a:endParaRPr/>
           </a:p>
         </p:txBody>
       </p:sp>
@@ -7032,7 +7159,7 @@
 </file>
 
 <file path=ppt/slides/slide2.xml><?xml version="1.0" encoding="utf-8"?>
-<p:sld xmlns:a="http://schemas.openxmlformats.org/drawingml/2006/main" xmlns:p="http://schemas.openxmlformats.org/presentationml/2006/main" xmlns:r="http://schemas.openxmlformats.org/officeDocument/2006/relationships">
+<p:sld xmlns:a="http://schemas.openxmlformats.org/drawingml/2006/main" xmlns:r="http://schemas.openxmlformats.org/officeDocument/2006/relationships" xmlns:p="http://schemas.openxmlformats.org/presentationml/2006/main">
   <p:cSld>
     <p:spTree>
       <p:nvGrpSpPr>
@@ -7040,7 +7167,14 @@
         <p:cNvGrpSpPr/>
         <p:nvPr/>
       </p:nvGrpSpPr>
-      <p:grpSpPr/>
+      <p:grpSpPr>
+        <a:xfrm>
+          <a:off x="0" y="0"/>
+          <a:ext cx="0" cy="0"/>
+          <a:chOff x="0" y="0"/>
+          <a:chExt cx="0" cy="0"/>
+        </a:xfrm>
+      </p:grpSpPr>
       <p:sp>
         <p:nvSpPr>
           <p:cNvPr id="2" name="Rectangle 1"/>
@@ -7081,6 +7215,7 @@
           <a:lstStyle/>
           <a:p>
             <a:pPr algn="ctr"/>
+            <a:endParaRPr/>
           </a:p>
         </p:txBody>
       </p:sp>
@@ -7159,6 +7294,7 @@
           <a:lstStyle/>
           <a:p>
             <a:pPr algn="ctr"/>
+            <a:endParaRPr/>
           </a:p>
         </p:txBody>
       </p:sp>
@@ -7202,6 +7338,7 @@
           <a:lstStyle/>
           <a:p>
             <a:pPr algn="ctr"/>
+            <a:endParaRPr/>
           </a:p>
         </p:txBody>
       </p:sp>
@@ -7315,6 +7452,7 @@
           <a:lstStyle/>
           <a:p>
             <a:pPr algn="ctr"/>
+            <a:endParaRPr/>
           </a:p>
         </p:txBody>
       </p:sp>
@@ -7428,6 +7566,7 @@
           <a:lstStyle/>
           <a:p>
             <a:pPr algn="ctr"/>
+            <a:endParaRPr/>
           </a:p>
         </p:txBody>
       </p:sp>
@@ -7541,6 +7680,7 @@
           <a:lstStyle/>
           <a:p>
             <a:pPr algn="ctr"/>
+            <a:endParaRPr/>
           </a:p>
         </p:txBody>
       </p:sp>
@@ -7654,6 +7794,7 @@
           <a:lstStyle/>
           <a:p>
             <a:pPr algn="ctr"/>
+            <a:endParaRPr/>
           </a:p>
         </p:txBody>
       </p:sp>
@@ -7767,6 +7908,7 @@
           <a:lstStyle/>
           <a:p>
             <a:pPr algn="ctr"/>
+            <a:endParaRPr/>
           </a:p>
         </p:txBody>
       </p:sp>
@@ -7849,7 +7991,7 @@
 </file>
 
 <file path=ppt/slides/slide3.xml><?xml version="1.0" encoding="utf-8"?>
-<p:sld xmlns:a="http://schemas.openxmlformats.org/drawingml/2006/main" xmlns:p="http://schemas.openxmlformats.org/presentationml/2006/main" xmlns:r="http://schemas.openxmlformats.org/officeDocument/2006/relationships">
+<p:sld xmlns:a="http://schemas.openxmlformats.org/drawingml/2006/main" xmlns:r="http://schemas.openxmlformats.org/officeDocument/2006/relationships" xmlns:p="http://schemas.openxmlformats.org/presentationml/2006/main">
   <p:cSld>
     <p:spTree>
       <p:nvGrpSpPr>
@@ -7857,7 +7999,14 @@
         <p:cNvGrpSpPr/>
         <p:nvPr/>
       </p:nvGrpSpPr>
-      <p:grpSpPr/>
+      <p:grpSpPr>
+        <a:xfrm>
+          <a:off x="0" y="0"/>
+          <a:ext cx="0" cy="0"/>
+          <a:chOff x="0" y="0"/>
+          <a:chExt cx="0" cy="0"/>
+        </a:xfrm>
+      </p:grpSpPr>
       <p:sp>
         <p:nvSpPr>
           <p:cNvPr id="2" name="Rectangle 1"/>
@@ -7898,6 +8047,7 @@
           <a:lstStyle/>
           <a:p>
             <a:pPr algn="ctr"/>
+            <a:endParaRPr/>
           </a:p>
         </p:txBody>
       </p:sp>
@@ -7976,6 +8126,7 @@
           <a:lstStyle/>
           <a:p>
             <a:pPr algn="ctr"/>
+            <a:endParaRPr/>
           </a:p>
         </p:txBody>
       </p:sp>
@@ -8198,7 +8349,7 @@
 </file>
 
 <file path=ppt/slides/slide4.xml><?xml version="1.0" encoding="utf-8"?>
-<p:sld xmlns:a="http://schemas.openxmlformats.org/drawingml/2006/main" xmlns:p="http://schemas.openxmlformats.org/presentationml/2006/main" xmlns:r="http://schemas.openxmlformats.org/officeDocument/2006/relationships">
+<p:sld xmlns:a="http://schemas.openxmlformats.org/drawingml/2006/main" xmlns:r="http://schemas.openxmlformats.org/officeDocument/2006/relationships" xmlns:p="http://schemas.openxmlformats.org/presentationml/2006/main">
   <p:cSld>
     <p:spTree>
       <p:nvGrpSpPr>
@@ -8206,7 +8357,14 @@
         <p:cNvGrpSpPr/>
         <p:nvPr/>
       </p:nvGrpSpPr>
-      <p:grpSpPr/>
+      <p:grpSpPr>
+        <a:xfrm>
+          <a:off x="0" y="0"/>
+          <a:ext cx="0" cy="0"/>
+          <a:chOff x="0" y="0"/>
+          <a:chExt cx="0" cy="0"/>
+        </a:xfrm>
+      </p:grpSpPr>
       <p:sp>
         <p:nvSpPr>
           <p:cNvPr id="2" name="Rectangle 1"/>
@@ -8247,6 +8405,7 @@
           <a:lstStyle/>
           <a:p>
             <a:pPr algn="ctr"/>
+            <a:endParaRPr/>
           </a:p>
         </p:txBody>
       </p:sp>
@@ -8325,6 +8484,7 @@
           <a:lstStyle/>
           <a:p>
             <a:pPr algn="ctr"/>
+            <a:endParaRPr/>
           </a:p>
         </p:txBody>
       </p:sp>
@@ -8547,7 +8707,7 @@
 </file>
 
 <file path=ppt/slides/slide5.xml><?xml version="1.0" encoding="utf-8"?>
-<p:sld xmlns:a="http://schemas.openxmlformats.org/drawingml/2006/main" xmlns:p="http://schemas.openxmlformats.org/presentationml/2006/main" xmlns:r="http://schemas.openxmlformats.org/officeDocument/2006/relationships">
+<p:sld xmlns:a="http://schemas.openxmlformats.org/drawingml/2006/main" xmlns:r="http://schemas.openxmlformats.org/officeDocument/2006/relationships" xmlns:p="http://schemas.openxmlformats.org/presentationml/2006/main">
   <p:cSld>
     <p:spTree>
       <p:nvGrpSpPr>
@@ -8555,7 +8715,14 @@
         <p:cNvGrpSpPr/>
         <p:nvPr/>
       </p:nvGrpSpPr>
-      <p:grpSpPr/>
+      <p:grpSpPr>
+        <a:xfrm>
+          <a:off x="0" y="0"/>
+          <a:ext cx="0" cy="0"/>
+          <a:chOff x="0" y="0"/>
+          <a:chExt cx="0" cy="0"/>
+        </a:xfrm>
+      </p:grpSpPr>
       <p:sp>
         <p:nvSpPr>
           <p:cNvPr id="2" name="Rectangle 1"/>
@@ -8596,6 +8763,7 @@
           <a:lstStyle/>
           <a:p>
             <a:pPr algn="ctr"/>
+            <a:endParaRPr/>
           </a:p>
         </p:txBody>
       </p:sp>
@@ -8674,6 +8842,7 @@
           <a:lstStyle/>
           <a:p>
             <a:pPr algn="ctr"/>
+            <a:endParaRPr/>
           </a:p>
         </p:txBody>
       </p:sp>
@@ -9036,7 +9205,7 @@
 </file>
 
 <file path=ppt/slides/slide6.xml><?xml version="1.0" encoding="utf-8"?>
-<p:sld xmlns:a="http://schemas.openxmlformats.org/drawingml/2006/main" xmlns:p="http://schemas.openxmlformats.org/presentationml/2006/main" xmlns:r="http://schemas.openxmlformats.org/officeDocument/2006/relationships">
+<p:sld xmlns:a="http://schemas.openxmlformats.org/drawingml/2006/main" xmlns:r="http://schemas.openxmlformats.org/officeDocument/2006/relationships" xmlns:p="http://schemas.openxmlformats.org/presentationml/2006/main">
   <p:cSld>
     <p:spTree>
       <p:nvGrpSpPr>
@@ -9044,7 +9213,14 @@
         <p:cNvGrpSpPr/>
         <p:nvPr/>
       </p:nvGrpSpPr>
-      <p:grpSpPr/>
+      <p:grpSpPr>
+        <a:xfrm>
+          <a:off x="0" y="0"/>
+          <a:ext cx="0" cy="0"/>
+          <a:chOff x="0" y="0"/>
+          <a:chExt cx="0" cy="0"/>
+        </a:xfrm>
+      </p:grpSpPr>
       <p:sp>
         <p:nvSpPr>
           <p:cNvPr id="2" name="Rectangle 1"/>
@@ -9085,6 +9261,7 @@
           <a:lstStyle/>
           <a:p>
             <a:pPr algn="ctr"/>
+            <a:endParaRPr/>
           </a:p>
         </p:txBody>
       </p:sp>
@@ -9163,6 +9340,7 @@
           <a:lstStyle/>
           <a:p>
             <a:pPr algn="ctr"/>
+            <a:endParaRPr/>
           </a:p>
         </p:txBody>
       </p:sp>
@@ -9385,7 +9563,7 @@
 </file>
 
 <file path=ppt/slides/slide7.xml><?xml version="1.0" encoding="utf-8"?>
-<p:sld xmlns:a="http://schemas.openxmlformats.org/drawingml/2006/main" xmlns:p="http://schemas.openxmlformats.org/presentationml/2006/main" xmlns:r="http://schemas.openxmlformats.org/officeDocument/2006/relationships">
+<p:sld xmlns:a="http://schemas.openxmlformats.org/drawingml/2006/main" xmlns:r="http://schemas.openxmlformats.org/officeDocument/2006/relationships" xmlns:p="http://schemas.openxmlformats.org/presentationml/2006/main">
   <p:cSld>
     <p:spTree>
       <p:nvGrpSpPr>
@@ -9393,7 +9571,14 @@
         <p:cNvGrpSpPr/>
         <p:nvPr/>
       </p:nvGrpSpPr>
-      <p:grpSpPr/>
+      <p:grpSpPr>
+        <a:xfrm>
+          <a:off x="0" y="0"/>
+          <a:ext cx="0" cy="0"/>
+          <a:chOff x="0" y="0"/>
+          <a:chExt cx="0" cy="0"/>
+        </a:xfrm>
+      </p:grpSpPr>
       <p:sp>
         <p:nvSpPr>
           <p:cNvPr id="2" name="Rectangle 1"/>
@@ -9434,6 +9619,7 @@
           <a:lstStyle/>
           <a:p>
             <a:pPr algn="ctr"/>
+            <a:endParaRPr/>
           </a:p>
         </p:txBody>
       </p:sp>
@@ -9512,6 +9698,7 @@
           <a:lstStyle/>
           <a:p>
             <a:pPr algn="ctr"/>
+            <a:endParaRPr/>
           </a:p>
         </p:txBody>
       </p:sp>
@@ -9734,7 +9921,7 @@
 </file>
 
 <file path=ppt/slides/slide8.xml><?xml version="1.0" encoding="utf-8"?>
-<p:sld xmlns:a="http://schemas.openxmlformats.org/drawingml/2006/main" xmlns:p="http://schemas.openxmlformats.org/presentationml/2006/main" xmlns:r="http://schemas.openxmlformats.org/officeDocument/2006/relationships">
+<p:sld xmlns:a="http://schemas.openxmlformats.org/drawingml/2006/main" xmlns:r="http://schemas.openxmlformats.org/officeDocument/2006/relationships" xmlns:p="http://schemas.openxmlformats.org/presentationml/2006/main">
   <p:cSld>
     <p:spTree>
       <p:nvGrpSpPr>
@@ -9742,7 +9929,14 @@
         <p:cNvGrpSpPr/>
         <p:nvPr/>
       </p:nvGrpSpPr>
-      <p:grpSpPr/>
+      <p:grpSpPr>
+        <a:xfrm>
+          <a:off x="0" y="0"/>
+          <a:ext cx="0" cy="0"/>
+          <a:chOff x="0" y="0"/>
+          <a:chExt cx="0" cy="0"/>
+        </a:xfrm>
+      </p:grpSpPr>
       <p:sp>
         <p:nvSpPr>
           <p:cNvPr id="2" name="Rectangle 1"/>
@@ -9783,6 +9977,7 @@
           <a:lstStyle/>
           <a:p>
             <a:pPr algn="ctr"/>
+            <a:endParaRPr/>
           </a:p>
         </p:txBody>
       </p:sp>
@@ -9861,6 +10056,7 @@
           <a:lstStyle/>
           <a:p>
             <a:pPr algn="ctr"/>
+            <a:endParaRPr/>
           </a:p>
         </p:txBody>
       </p:sp>
@@ -9908,7 +10104,7 @@
 </file>
 
 <file path=ppt/slides/slide9.xml><?xml version="1.0" encoding="utf-8"?>
-<p:sld xmlns:a="http://schemas.openxmlformats.org/drawingml/2006/main" xmlns:p="http://schemas.openxmlformats.org/presentationml/2006/main" xmlns:r="http://schemas.openxmlformats.org/officeDocument/2006/relationships">
+<p:sld xmlns:a="http://schemas.openxmlformats.org/drawingml/2006/main" xmlns:r="http://schemas.openxmlformats.org/officeDocument/2006/relationships" xmlns:p="http://schemas.openxmlformats.org/presentationml/2006/main">
   <p:cSld>
     <p:spTree>
       <p:nvGrpSpPr>
@@ -9916,7 +10112,14 @@
         <p:cNvGrpSpPr/>
         <p:nvPr/>
       </p:nvGrpSpPr>
-      <p:grpSpPr/>
+      <p:grpSpPr>
+        <a:xfrm>
+          <a:off x="0" y="0"/>
+          <a:ext cx="0" cy="0"/>
+          <a:chOff x="0" y="0"/>
+          <a:chExt cx="0" cy="0"/>
+        </a:xfrm>
+      </p:grpSpPr>
       <p:sp>
         <p:nvSpPr>
           <p:cNvPr id="2" name="Rectangle 1"/>
@@ -9957,6 +10160,7 @@
           <a:lstStyle/>
           <a:p>
             <a:pPr algn="ctr"/>
+            <a:endParaRPr/>
           </a:p>
         </p:txBody>
       </p:sp>
@@ -10035,6 +10239,7 @@
           <a:lstStyle/>
           <a:p>
             <a:pPr algn="ctr"/>
+            <a:endParaRPr/>
           </a:p>
         </p:txBody>
       </p:sp>
@@ -10288,6 +10493,7 @@
           <a:lstStyle/>
           <a:p>
             <a:pPr algn="ctr"/>
+            <a:endParaRPr/>
           </a:p>
         </p:txBody>
       </p:sp>
@@ -10366,6 +10572,7 @@
           <a:lstStyle/>
           <a:p>
             <a:pPr algn="ctr"/>
+            <a:endParaRPr/>
           </a:p>
         </p:txBody>
       </p:sp>
